--- a/Slides/Module-14-Files-and-Data.pptx
+++ b/Slides/Module-14-Files-and-Data.pptx
@@ -114,7 +114,7 @@
   <p:extLst>
     <p:ext uri="{521415D9-36F7-43E2-AB2F-B90AF26B5E84}">
       <p14:sectionLst xmlns:p14="http://schemas.microsoft.com/office/powerpoint/2010/main">
-        <p14:section name="Module 14" id="{cab94b21-30a2-bc0c-3bc3-b13af246fb04}">
+        <p14:section name="Module 14" id="{561f56b5-1069-f93e-c4d3-9af03359b4bd}">
           <p14:sldIdLst>
             <p14:sldId id="256"/>
             <p14:sldId id="257"/>
@@ -10998,7 +10998,7 @@
                   <a:srgbClr val="F89820"/>
                 </a:solidFill>
               </a:rPr>
-              <a:t>Next: Module 15, Generics, Collections &amp; Lambdas</a:t>
+              <a:t>Next: Module 15 (or the optional 14b, Databases)</a:t>
             </a:r>
             <a:endParaRPr lang="en-US" sz="1250" dirty="0"/>
           </a:p>
